--- a/Graphical Abstract.pptx
+++ b/Graphical Abstract.pptx
@@ -259,7 +259,7 @@
           <a:p>
             <a:fld id="{7C2953E9-D861-4423-82BD-E673411ACA45}" type="datetimeFigureOut">
               <a:rPr lang="en-US" smtClean="0"/>
-              <a:t>2/2/2024</a:t>
+              <a:t>4/2/2024</a:t>
             </a:fld>
             <a:endParaRPr lang="en-US"/>
           </a:p>
@@ -457,7 +457,7 @@
           <a:p>
             <a:fld id="{7C2953E9-D861-4423-82BD-E673411ACA45}" type="datetimeFigureOut">
               <a:rPr lang="en-US" smtClean="0"/>
-              <a:t>2/2/2024</a:t>
+              <a:t>4/2/2024</a:t>
             </a:fld>
             <a:endParaRPr lang="en-US"/>
           </a:p>
@@ -665,7 +665,7 @@
           <a:p>
             <a:fld id="{7C2953E9-D861-4423-82BD-E673411ACA45}" type="datetimeFigureOut">
               <a:rPr lang="en-US" smtClean="0"/>
-              <a:t>2/2/2024</a:t>
+              <a:t>4/2/2024</a:t>
             </a:fld>
             <a:endParaRPr lang="en-US"/>
           </a:p>
@@ -863,7 +863,7 @@
           <a:p>
             <a:fld id="{7C2953E9-D861-4423-82BD-E673411ACA45}" type="datetimeFigureOut">
               <a:rPr lang="en-US" smtClean="0"/>
-              <a:t>2/2/2024</a:t>
+              <a:t>4/2/2024</a:t>
             </a:fld>
             <a:endParaRPr lang="en-US"/>
           </a:p>
@@ -1138,7 +1138,7 @@
           <a:p>
             <a:fld id="{7C2953E9-D861-4423-82BD-E673411ACA45}" type="datetimeFigureOut">
               <a:rPr lang="en-US" smtClean="0"/>
-              <a:t>2/2/2024</a:t>
+              <a:t>4/2/2024</a:t>
             </a:fld>
             <a:endParaRPr lang="en-US"/>
           </a:p>
@@ -1403,7 +1403,7 @@
           <a:p>
             <a:fld id="{7C2953E9-D861-4423-82BD-E673411ACA45}" type="datetimeFigureOut">
               <a:rPr lang="en-US" smtClean="0"/>
-              <a:t>2/2/2024</a:t>
+              <a:t>4/2/2024</a:t>
             </a:fld>
             <a:endParaRPr lang="en-US"/>
           </a:p>
@@ -1815,7 +1815,7 @@
           <a:p>
             <a:fld id="{7C2953E9-D861-4423-82BD-E673411ACA45}" type="datetimeFigureOut">
               <a:rPr lang="en-US" smtClean="0"/>
-              <a:t>2/2/2024</a:t>
+              <a:t>4/2/2024</a:t>
             </a:fld>
             <a:endParaRPr lang="en-US"/>
           </a:p>
@@ -1956,7 +1956,7 @@
           <a:p>
             <a:fld id="{7C2953E9-D861-4423-82BD-E673411ACA45}" type="datetimeFigureOut">
               <a:rPr lang="en-US" smtClean="0"/>
-              <a:t>2/2/2024</a:t>
+              <a:t>4/2/2024</a:t>
             </a:fld>
             <a:endParaRPr lang="en-US"/>
           </a:p>
@@ -2069,7 +2069,7 @@
           <a:p>
             <a:fld id="{7C2953E9-D861-4423-82BD-E673411ACA45}" type="datetimeFigureOut">
               <a:rPr lang="en-US" smtClean="0"/>
-              <a:t>2/2/2024</a:t>
+              <a:t>4/2/2024</a:t>
             </a:fld>
             <a:endParaRPr lang="en-US"/>
           </a:p>
@@ -2380,7 +2380,7 @@
           <a:p>
             <a:fld id="{7C2953E9-D861-4423-82BD-E673411ACA45}" type="datetimeFigureOut">
               <a:rPr lang="en-US" smtClean="0"/>
-              <a:t>2/2/2024</a:t>
+              <a:t>4/2/2024</a:t>
             </a:fld>
             <a:endParaRPr lang="en-US"/>
           </a:p>
@@ -2668,7 +2668,7 @@
           <a:p>
             <a:fld id="{7C2953E9-D861-4423-82BD-E673411ACA45}" type="datetimeFigureOut">
               <a:rPr lang="en-US" smtClean="0"/>
-              <a:t>2/2/2024</a:t>
+              <a:t>4/2/2024</a:t>
             </a:fld>
             <a:endParaRPr lang="en-US"/>
           </a:p>
@@ -2909,7 +2909,7 @@
           <a:p>
             <a:fld id="{7C2953E9-D861-4423-82BD-E673411ACA45}" type="datetimeFigureOut">
               <a:rPr lang="en-US" smtClean="0"/>
-              <a:t>2/2/2024</a:t>
+              <a:t>4/2/2024</a:t>
             </a:fld>
             <a:endParaRPr lang="en-US"/>
           </a:p>
@@ -3815,7 +3815,7 @@
               <p:spPr>
                 <a:xfrm>
                   <a:off x="1372202" y="3174326"/>
-                  <a:ext cx="1198949" cy="646331"/>
+                  <a:ext cx="1198949" cy="565194"/>
                 </a:xfrm>
                 <a:prstGeom prst="rect">
                   <a:avLst/>
@@ -3830,7 +3830,7 @@
                 <a:p>
                   <a:r>
                     <a:rPr lang="en-US" sz="1200" dirty="0"/>
-                    <a:t>x6 (similar distributions at different scales)</a:t>
+                    <a:t>×6 (similar distributions at different scales)</a:t>
                   </a:r>
                 </a:p>
               </p:txBody>
@@ -4593,8 +4593,8 @@
             </p:nvCxnSpPr>
             <p:spPr>
               <a:xfrm rot="5400000">
-                <a:off x="2932295" y="4674744"/>
-                <a:ext cx="542217" cy="607052"/>
+                <a:off x="2923653" y="4666103"/>
+                <a:ext cx="559500" cy="607052"/>
               </a:xfrm>
               <a:prstGeom prst="bentConnector2">
                 <a:avLst/>
@@ -4613,8 +4613,8 @@
               <a:effectLst/>
             </p:spPr>
           </p:cxnSp>
-          <mc:AlternateContent xmlns:mc="http://schemas.openxmlformats.org/markup-compatibility/2006">
-            <mc:Choice xmlns:a14="http://schemas.microsoft.com/office/drawing/2010/main" Requires="a14">
+          <mc:AlternateContent xmlns:mc="http://schemas.openxmlformats.org/markup-compatibility/2006" xmlns:a14="http://schemas.microsoft.com/office/drawing/2010/main">
+            <mc:Choice Requires="a14">
               <p:sp>
                 <p:nvSpPr>
                   <p:cNvPr id="13" name="TextBox 12">
@@ -4772,7 +4772,7 @@
                 </p:txBody>
               </p:sp>
             </mc:Choice>
-            <mc:Fallback>
+            <mc:Fallback xmlns="">
               <p:sp>
                 <p:nvSpPr>
                   <p:cNvPr id="13" name="TextBox 12">
@@ -4916,7 +4916,7 @@
             <p:spPr>
               <a:xfrm>
                 <a:off x="3005724" y="4286169"/>
-                <a:ext cx="1002409" cy="420993"/>
+                <a:ext cx="1002409" cy="403710"/>
               </a:xfrm>
               <a:prstGeom prst="rect">
                 <a:avLst/>
@@ -4938,13 +4938,13 @@
               <a:p>
                 <a:r>
                   <a:rPr lang="en-US" sz="1200" dirty="0"/>
-                  <a:t>Finite element analysis</a:t>
+                  <a:t>Finite element analysis solver</a:t>
                 </a:r>
               </a:p>
             </p:txBody>
           </p:sp>
-          <mc:AlternateContent xmlns:mc="http://schemas.openxmlformats.org/markup-compatibility/2006">
-            <mc:Choice xmlns:a14="http://schemas.microsoft.com/office/drawing/2010/main" Requires="a14">
+          <mc:AlternateContent xmlns:mc="http://schemas.openxmlformats.org/markup-compatibility/2006" xmlns:a14="http://schemas.microsoft.com/office/drawing/2010/main">
+            <mc:Choice Requires="a14">
               <p:sp>
                 <p:nvSpPr>
                   <p:cNvPr id="68" name="TextBox 67">
@@ -5023,7 +5023,7 @@
                 </p:txBody>
               </p:sp>
             </mc:Choice>
-            <mc:Fallback>
+            <mc:Fallback xmlns="">
               <p:sp>
                 <p:nvSpPr>
                   <p:cNvPr id="68" name="TextBox 67">
@@ -5068,8 +5068,8 @@
               </p:sp>
             </mc:Fallback>
           </mc:AlternateContent>
-          <mc:AlternateContent xmlns:mc="http://schemas.openxmlformats.org/markup-compatibility/2006">
-            <mc:Choice xmlns:a14="http://schemas.microsoft.com/office/drawing/2010/main" Requires="a14">
+          <mc:AlternateContent xmlns:mc="http://schemas.openxmlformats.org/markup-compatibility/2006" xmlns:a14="http://schemas.microsoft.com/office/drawing/2010/main">
+            <mc:Choice Requires="a14">
               <p:sp>
                 <p:nvSpPr>
                   <p:cNvPr id="69" name="TextBox 68">
@@ -5148,7 +5148,7 @@
                 </p:txBody>
               </p:sp>
             </mc:Choice>
-            <mc:Fallback>
+            <mc:Fallback xmlns="">
               <p:sp>
                 <p:nvSpPr>
                   <p:cNvPr id="69" name="TextBox 68">
@@ -5193,8 +5193,8 @@
               </p:sp>
             </mc:Fallback>
           </mc:AlternateContent>
-          <mc:AlternateContent xmlns:mc="http://schemas.openxmlformats.org/markup-compatibility/2006">
-            <mc:Choice xmlns:a14="http://schemas.microsoft.com/office/drawing/2010/main" Requires="a14">
+          <mc:AlternateContent xmlns:mc="http://schemas.openxmlformats.org/markup-compatibility/2006" xmlns:a14="http://schemas.microsoft.com/office/drawing/2010/main">
+            <mc:Choice Requires="a14">
               <p:sp>
                 <p:nvSpPr>
                   <p:cNvPr id="71" name="TextBox 70">
@@ -5252,7 +5252,7 @@
                 </p:txBody>
               </p:sp>
             </mc:Choice>
-            <mc:Fallback>
+            <mc:Fallback xmlns="">
               <p:sp>
                 <p:nvSpPr>
                   <p:cNvPr id="71" name="TextBox 70">
